--- a/analysis/oee-q1-vs-last3.pptx
+++ b/analysis/oee-q1-vs-last3.pptx
@@ -176,13 +176,13 @@
                     <c:v>Dansac Closed Pouch  (3)</c:v>
                   </c:pt>
                   <c:pt idx="1">
-                    <c:v>BFX Cells  (1)</c:v>
+                    <c:v>Hollister Closed Pouch  (6)</c:v>
                   </c:pt>
                   <c:pt idx="2">
-                    <c:v>Hollister Closed Pouch  (6)</c:v>
+                    <c:v>BIM Machines  (17)</c:v>
                   </c:pt>
                   <c:pt idx="3">
-                    <c:v>BIM Machines  (17)</c:v>
+                    <c:v>BFX Cells  (1)</c:v>
                   </c:pt>
                   <c:pt idx="4">
                     <c:v>Hollister Drainable Pouch  (8)</c:v>
@@ -210,13 +210,13 @@
                   <c:v>62.9</c:v>
                 </c:pt>
                 <c:pt idx="1">
-                  <c:v>58.9</c:v>
+                  <c:v>69.3</c:v>
                 </c:pt>
                 <c:pt idx="2">
-                  <c:v>69.3</c:v>
+                  <c:v>71.1</c:v>
                 </c:pt>
                 <c:pt idx="3">
-                  <c:v>71.1</c:v>
+                  <c:v>58.9</c:v>
                 </c:pt>
                 <c:pt idx="4">
                   <c:v>59.6</c:v>
@@ -289,13 +289,13 @@
                     <c:v>Dansac Closed Pouch  (3)</c:v>
                   </c:pt>
                   <c:pt idx="1">
-                    <c:v>BFX Cells  (1)</c:v>
+                    <c:v>Hollister Closed Pouch  (6)</c:v>
                   </c:pt>
                   <c:pt idx="2">
-                    <c:v>Hollister Closed Pouch  (6)</c:v>
+                    <c:v>BIM Machines  (17)</c:v>
                   </c:pt>
                   <c:pt idx="3">
-                    <c:v>BIM Machines  (17)</c:v>
+                    <c:v>BFX Cells  (1)</c:v>
                   </c:pt>
                   <c:pt idx="4">
                     <c:v>Hollister Drainable Pouch  (8)</c:v>
@@ -323,13 +323,13 @@
                   <c:v>40.4</c:v>
                 </c:pt>
                 <c:pt idx="1">
-                  <c:v>61.1</c:v>
+                  <c:v>55.3</c:v>
                 </c:pt>
                 <c:pt idx="2">
-                  <c:v>55.3</c:v>
+                  <c:v>54.3</c:v>
                 </c:pt>
                 <c:pt idx="3">
-                  <c:v>54.3</c:v>
+                  <c:v>61.1</c:v>
                 </c:pt>
                 <c:pt idx="4">
                   <c:v>55.9</c:v>
@@ -402,13 +402,13 @@
                     <c:v>Dansac Closed Pouch  (3)</c:v>
                   </c:pt>
                   <c:pt idx="1">
-                    <c:v>BFX Cells  (1)</c:v>
+                    <c:v>Hollister Closed Pouch  (6)</c:v>
                   </c:pt>
                   <c:pt idx="2">
-                    <c:v>Hollister Closed Pouch  (6)</c:v>
+                    <c:v>BIM Machines  (17)</c:v>
                   </c:pt>
                   <c:pt idx="3">
-                    <c:v>BIM Machines  (17)</c:v>
+                    <c:v>BFX Cells  (1)</c:v>
                   </c:pt>
                   <c:pt idx="4">
                     <c:v>Hollister Drainable Pouch  (8)</c:v>
@@ -436,13 +436,13 @@
                   <c:v>40.5</c:v>
                 </c:pt>
                 <c:pt idx="1">
-                  <c:v>45.5</c:v>
+                  <c:v>49.7</c:v>
                 </c:pt>
                 <c:pt idx="2">
-                  <c:v>49.7</c:v>
+                  <c:v>54.7</c:v>
                 </c:pt>
                 <c:pt idx="3">
-                  <c:v>54.7</c:v>
+                  <c:v>55</c:v>
                 </c:pt>
                 <c:pt idx="4">
                   <c:v>56.4</c:v>
@@ -1019,7 +1019,7 @@
           <a:p>
             <a:r>
               <a:rPr lang="en-US" dirty="0"/>
-              <a:t>Company OEE for the last three months (May–Jul 2026) is 55.3%, against 56.4% for the Jan–Apr 2026 baseline - a slip of −1.0 points, and −13.3 against target. April is in the baseline because it ran below the Jan-Mar average and ranked 4th of the seven months, so it is not part of any recent improvement. Urostomy (HU) Cells and Ring / Extruder are excluded from the chart and the company average. The largest deterioration is 1-Piece Autocoiners at -5.8 points, caused by two machines. Dansac Drainable is the only family above target. Slides 2 and 3 carry the family-by-month and workcell-level figures behind the chart.</a:t>
+              <a:t>Company OEE for the last three months (May–Jul 2026) is 55.5%, against 56.4% for the Jan–Apr 2026 baseline - a slip of −0.8 points, and −13.1 against target. April is in the baseline because it ran below the Jan-Mar average and ranked 4th of the seven months, so it is not part of any recent improvement. Urostomy (HU) Cells and Ring / Extruder are excluded from the chart and the company average. The largest deterioration is 1-Piece Autocoiners at -5.8 points, caused by two machines. Dansac Drainable is the only family above target. Slides 2 and 3 carry the family-by-month and workcell-level figures behind the chart.</a:t>
             </a:r>
             <a:endParaRPr lang="en-US" dirty="0"/>
           </a:p>
@@ -1757,7 +1757,7 @@
                 <a:ea typeface="Calibri" pitchFamily="34" charset="-122"/>
                 <a:cs typeface="Calibri" pitchFamily="34" charset="-120"/>
               </a:rPr>
-              <a:t>55.3%</a:t>
+              <a:t>55.5%</a:t>
             </a:r>
             <a:endParaRPr lang="en-US" sz="3200" dirty="0"/>
           </a:p>
@@ -1799,7 +1799,7 @@
                 <a:ea typeface="Calibri" pitchFamily="34" charset="-122"/>
                 <a:cs typeface="Calibri" pitchFamily="34" charset="-120"/>
               </a:rPr>
-              <a:t>−1.0 pts</a:t>
+              <a:t>−0.8 pts</a:t>
             </a:r>
             <a:pPr indent="0" marL="0">
               <a:lnSpc>
@@ -1836,7 +1836,7 @@
                 <a:ea typeface="Calibri" pitchFamily="34" charset="-122"/>
                 <a:cs typeface="Calibri" pitchFamily="34" charset="-120"/>
               </a:rPr>
-              <a:t>−13.3 pts</a:t>
+              <a:t>−13.1 pts</a:t>
             </a:r>
             <a:pPr indent="0" marL="0">
               <a:lnSpc>
@@ -2507,7 +2507,7 @@
                 <a:ea typeface="Calibri" pitchFamily="34" charset="-122"/>
                 <a:cs typeface="Calibri" pitchFamily="34" charset="-120"/>
               </a:rPr>
-              <a:t>56.4% → 55.3%</a:t>
+              <a:t>56.4% → 55.5%</a:t>
             </a:r>
             <a:pPr indent="0" marL="0">
               <a:lnSpc>
@@ -2524,7 +2524,7 @@
                 <a:ea typeface="Calibri" pitchFamily="34" charset="-122"/>
                 <a:cs typeface="Calibri" pitchFamily="34" charset="-120"/>
               </a:rPr>
-              <a:t> (−1.0 pts) and still 13.3 pts under target. March was the high point at 58.9%; nothing since has matched it.</a:t>
+              <a:t> (−0.8 pts) and still 13.1 pts under target. March was the high point at 58.9%; nothing since has matched it.</a:t>
             </a:r>
             <a:endParaRPr lang="en-US" sz="950" dirty="0"/>
           </a:p>
@@ -2676,7 +2676,7 @@
                 <a:ea typeface="Calibri" pitchFamily="34" charset="-122"/>
                 <a:cs typeface="Calibri" pitchFamily="34" charset="-120"/>
               </a:rPr>
-              <a:t> on two machines alone: Autocoiner #5 (74.5→43.8) and #3 (67.2→40.6). The other ten held. BFX dropped further (−15.6) but is a single cell.</a:t>
+              <a:t> on two machines alone: Autocoiner #5 (74.5→43.8) and #3 (67.2→40.6). The other ten held. Hollister Closed Pouch is next at −5.5, led by PCH04 and PCH01.</a:t>
             </a:r>
             <a:endParaRPr lang="en-US" sz="950" dirty="0"/>
           </a:p>
@@ -3257,7 +3257,7 @@
                 <a:ea typeface="Calibri" pitchFamily="34" charset="-122"/>
                 <a:cs typeface="Calibri" pitchFamily="34" charset="-120"/>
               </a:rPr>
-              <a:t>Source: Monthly OEE Live File — “OEE% by Month” and “WC Target OEE” tabs. Baseline = Jan–Apr 2026; last 3 months = May–Jul 2026 (July is the most recent complete month). April sits in the baseline: at 56.0% it ran below the Jan–Mar average and ranked 4th of the seven months. Urostomy (HU) Cells and Ring / Extruder are excluded throughout. Averages are the equal-weighted mean of each workcell’s monthly OEE; months with no production are excluded, months recorded as 0% are included.</a:t>
+              <a:t>Source: Monthly OEE Live File — “OEE% by Month” and “WC Target OEE” tabs. Baseline = Jan–Apr 2026; last 3 months = May–Jul 2026 (July is the most recent complete month). April sits in the baseline: at 56.0% it ran below the Jan–Mar average and ranked 4th of the seven months. Urostomy (HU) Cells and Ring / Extruder are excluded throughout. BFX1’s July reading is excluded from every average, so BFX Cells and the company figure are built from May–Jun for that cell. Averages are the equal-weighted mean of each workcell’s monthly OEE; months with no production are excluded, months recorded as 0% are included.</a:t>
             </a:r>
             <a:endParaRPr lang="en-US" sz="750" dirty="0"/>
           </a:p>
@@ -8115,7 +8115,7 @@
                           <a:ea typeface="Calibri" pitchFamily="34" charset="-122"/>
                           <a:cs typeface="Calibri" pitchFamily="34" charset="-120"/>
                         </a:rPr>
-                        <a:t>BIM Machines</a:t>
+                        <a:t>BFX Cells</a:t>
                       </a:r>
                       <a:endParaRPr lang="en-US" sz="1000" dirty="0">
                         <a:latin typeface="Calibri" charset="0"/>
@@ -8180,7 +8180,7 @@
                           <a:ea typeface="Calibri" pitchFamily="34" charset="-122"/>
                           <a:cs typeface="Calibri" pitchFamily="34" charset="-120"/>
                         </a:rPr>
-                        <a:t>17</a:t>
+                        <a:t>1</a:t>
                       </a:r>
                       <a:endParaRPr lang="en-US" sz="1000" dirty="0">
                         <a:latin typeface="Calibri" charset="0"/>
@@ -8245,7 +8245,7 @@
                           <a:ea typeface="Calibri" pitchFamily="34" charset="-122"/>
                           <a:cs typeface="Calibri" pitchFamily="34" charset="-120"/>
                         </a:rPr>
-                        <a:t>71.1</a:t>
+                        <a:t>58.9</a:t>
                       </a:r>
                       <a:endParaRPr lang="en-US" sz="1000" dirty="0">
                         <a:latin typeface="Calibri" charset="0"/>
@@ -8310,7 +8310,7 @@
                           <a:ea typeface="Calibri" pitchFamily="34" charset="-122"/>
                           <a:cs typeface="Calibri" pitchFamily="34" charset="-120"/>
                         </a:rPr>
-                        <a:t>50.9</a:t>
+                        <a:t>58.5</a:t>
                       </a:r>
                       <a:endParaRPr lang="en-US" sz="1000" dirty="0">
                         <a:latin typeface="Calibri" charset="0"/>
@@ -8375,7 +8375,7 @@
                           <a:ea typeface="Calibri" pitchFamily="34" charset="-122"/>
                           <a:cs typeface="Calibri" pitchFamily="34" charset="-120"/>
                         </a:rPr>
-                        <a:t>55.7</a:t>
+                        <a:t>59.7</a:t>
                       </a:r>
                       <a:endParaRPr lang="en-US" sz="1000" dirty="0">
                         <a:latin typeface="Calibri" charset="0"/>
@@ -8505,7 +8505,7 @@
                           <a:ea typeface="Calibri" pitchFamily="34" charset="-122"/>
                           <a:cs typeface="Calibri" pitchFamily="34" charset="-120"/>
                         </a:rPr>
-                        <a:t>56.1</a:t>
+                        <a:t>71.6</a:t>
                       </a:r>
                       <a:endParaRPr lang="en-US" sz="1000" dirty="0">
                         <a:latin typeface="Calibri" charset="0"/>
@@ -8570,7 +8570,7 @@
                           <a:ea typeface="Calibri" pitchFamily="34" charset="-122"/>
                           <a:cs typeface="Calibri" pitchFamily="34" charset="-120"/>
                         </a:rPr>
-                        <a:t>55.2</a:t>
+                        <a:t>64.7</a:t>
                       </a:r>
                       <a:endParaRPr lang="en-US" sz="1000" dirty="0">
                         <a:latin typeface="Calibri" charset="0"/>
@@ -8635,7 +8635,7 @@
                           <a:ea typeface="Calibri" pitchFamily="34" charset="-122"/>
                           <a:cs typeface="Calibri" pitchFamily="34" charset="-120"/>
                         </a:rPr>
-                        <a:t>56.7</a:t>
+                        <a:t>45.3</a:t>
                       </a:r>
                       <a:endParaRPr lang="en-US" sz="1000" dirty="0">
                         <a:latin typeface="Calibri" charset="0"/>
@@ -8700,7 +8700,7 @@
                           <a:ea typeface="Calibri" pitchFamily="34" charset="-122"/>
                           <a:cs typeface="Calibri" pitchFamily="34" charset="-120"/>
                         </a:rPr>
-                        <a:t>52.0</a:t>
+                        <a:t>—</a:t>
                       </a:r>
                       <a:endParaRPr lang="en-US" sz="1000" dirty="0">
                         <a:latin typeface="Calibri" charset="0"/>
@@ -8765,7 +8765,7 @@
                           <a:ea typeface="Calibri" pitchFamily="34" charset="-122"/>
                           <a:cs typeface="Calibri" pitchFamily="34" charset="-120"/>
                         </a:rPr>
-                        <a:t>54.3</a:t>
+                        <a:t>61.1</a:t>
                       </a:r>
                       <a:endParaRPr lang="en-US" sz="1000" dirty="0">
                         <a:latin typeface="Calibri" charset="0"/>
@@ -8830,7 +8830,7 @@
                           <a:ea typeface="Calibri" pitchFamily="34" charset="-122"/>
                           <a:cs typeface="Calibri" pitchFamily="34" charset="-120"/>
                         </a:rPr>
-                        <a:t>54.7</a:t>
+                        <a:t>55.0</a:t>
                       </a:r>
                       <a:endParaRPr lang="en-US" sz="1000" dirty="0">
                         <a:latin typeface="Calibri" charset="0"/>
@@ -8889,13 +8889,13 @@
                       <a:r>
                         <a:rPr lang="en-US" sz="1000" b="1" dirty="0">
                           <a:solidFill>
-                            <a:srgbClr val="1C6B45"/>
-                          </a:solidFill>
-                          <a:latin typeface="Calibri" pitchFamily="34" charset="0"/>
-                          <a:ea typeface="Calibri" pitchFamily="34" charset="-122"/>
-                          <a:cs typeface="Calibri" pitchFamily="34" charset="-120"/>
-                        </a:rPr>
-                        <a:t>+0.3</a:t>
+                            <a:srgbClr val="9E2A2B"/>
+                          </a:solidFill>
+                          <a:latin typeface="Calibri" pitchFamily="34" charset="0"/>
+                          <a:ea typeface="Calibri" pitchFamily="34" charset="-122"/>
+                          <a:cs typeface="Calibri" pitchFamily="34" charset="-120"/>
+                        </a:rPr>
+                        <a:t>−6.1</a:t>
                       </a:r>
                       <a:endParaRPr lang="en-US" sz="1000" dirty="0">
                         <a:latin typeface="Calibri" charset="0"/>
@@ -8960,7 +8960,7 @@
                           <a:ea typeface="Calibri" pitchFamily="34" charset="-122"/>
                           <a:cs typeface="Calibri" pitchFamily="34" charset="-120"/>
                         </a:rPr>
-                        <a:t>−16.4</a:t>
+                        <a:t>−3.9</a:t>
                       </a:r>
                       <a:endParaRPr lang="en-US" sz="1000" dirty="0">
                         <a:latin typeface="Calibri" charset="0"/>
@@ -9027,7 +9027,7 @@
                           <a:ea typeface="Calibri" pitchFamily="34" charset="-122"/>
                           <a:cs typeface="Calibri" pitchFamily="34" charset="-120"/>
                         </a:rPr>
-                        <a:t>Hollister Closed Pouch</a:t>
+                        <a:t>BIM Machines</a:t>
                       </a:r>
                       <a:endParaRPr lang="en-US" sz="1000" dirty="0">
                         <a:latin typeface="Calibri" charset="0"/>
@@ -9095,7 +9095,7 @@
                           <a:ea typeface="Calibri" pitchFamily="34" charset="-122"/>
                           <a:cs typeface="Calibri" pitchFamily="34" charset="-120"/>
                         </a:rPr>
-                        <a:t>6</a:t>
+                        <a:t>17</a:t>
                       </a:r>
                       <a:endParaRPr lang="en-US" sz="1000" dirty="0">
                         <a:latin typeface="Calibri" charset="0"/>
@@ -9163,7 +9163,7 @@
                           <a:ea typeface="Calibri" pitchFamily="34" charset="-122"/>
                           <a:cs typeface="Calibri" pitchFamily="34" charset="-120"/>
                         </a:rPr>
-                        <a:t>69.3</a:t>
+                        <a:t>71.1</a:t>
                       </a:r>
                       <a:endParaRPr lang="en-US" sz="1000" dirty="0">
                         <a:latin typeface="Calibri" charset="0"/>
@@ -9231,7 +9231,7 @@
                           <a:ea typeface="Calibri" pitchFamily="34" charset="-122"/>
                           <a:cs typeface="Calibri" pitchFamily="34" charset="-120"/>
                         </a:rPr>
-                        <a:t>55.8</a:t>
+                        <a:t>50.9</a:t>
                       </a:r>
                       <a:endParaRPr lang="en-US" sz="1000" dirty="0">
                         <a:latin typeface="Calibri" charset="0"/>
@@ -9299,7 +9299,7 @@
                           <a:ea typeface="Calibri" pitchFamily="34" charset="-122"/>
                           <a:cs typeface="Calibri" pitchFamily="34" charset="-120"/>
                         </a:rPr>
-                        <a:t>54.5</a:t>
+                        <a:t>55.7</a:t>
                       </a:r>
                       <a:endParaRPr lang="en-US" sz="1000" dirty="0">
                         <a:latin typeface="Calibri" charset="0"/>
@@ -9367,7 +9367,7 @@
                           <a:ea typeface="Calibri" pitchFamily="34" charset="-122"/>
                           <a:cs typeface="Calibri" pitchFamily="34" charset="-120"/>
                         </a:rPr>
-                        <a:t>54.0</a:t>
+                        <a:t>54.5</a:t>
                       </a:r>
                       <a:endParaRPr lang="en-US" sz="1000" dirty="0">
                         <a:latin typeface="Calibri" charset="0"/>
@@ -9435,7 +9435,7 @@
                           <a:ea typeface="Calibri" pitchFamily="34" charset="-122"/>
                           <a:cs typeface="Calibri" pitchFamily="34" charset="-120"/>
                         </a:rPr>
-                        <a:t>56.8</a:t>
+                        <a:t>56.1</a:t>
                       </a:r>
                       <a:endParaRPr lang="en-US" sz="1000" dirty="0">
                         <a:latin typeface="Calibri" charset="0"/>
@@ -9503,7 +9503,7 @@
                           <a:ea typeface="Calibri" pitchFamily="34" charset="-122"/>
                           <a:cs typeface="Calibri" pitchFamily="34" charset="-120"/>
                         </a:rPr>
-                        <a:t>44.4</a:t>
+                        <a:t>55.2</a:t>
                       </a:r>
                       <a:endParaRPr lang="en-US" sz="1000" dirty="0">
                         <a:latin typeface="Calibri" charset="0"/>
@@ -9571,7 +9571,7 @@
                           <a:ea typeface="Calibri" pitchFamily="34" charset="-122"/>
                           <a:cs typeface="Calibri" pitchFamily="34" charset="-120"/>
                         </a:rPr>
-                        <a:t>53.8</a:t>
+                        <a:t>56.7</a:t>
                       </a:r>
                       <a:endParaRPr lang="en-US" sz="1000" dirty="0">
                         <a:latin typeface="Calibri" charset="0"/>
@@ -9639,7 +9639,7 @@
                           <a:ea typeface="Calibri" pitchFamily="34" charset="-122"/>
                           <a:cs typeface="Calibri" pitchFamily="34" charset="-120"/>
                         </a:rPr>
-                        <a:t>51.0</a:t>
+                        <a:t>52.0</a:t>
                       </a:r>
                       <a:endParaRPr lang="en-US" sz="1000" dirty="0">
                         <a:latin typeface="Calibri" charset="0"/>
@@ -9707,7 +9707,7 @@
                           <a:ea typeface="Calibri" pitchFamily="34" charset="-122"/>
                           <a:cs typeface="Calibri" pitchFamily="34" charset="-120"/>
                         </a:rPr>
-                        <a:t>55.3</a:t>
+                        <a:t>54.3</a:t>
                       </a:r>
                       <a:endParaRPr lang="en-US" sz="1000" dirty="0">
                         <a:latin typeface="Calibri" charset="0"/>
@@ -9775,7 +9775,7 @@
                           <a:ea typeface="Calibri" pitchFamily="34" charset="-122"/>
                           <a:cs typeface="Calibri" pitchFamily="34" charset="-120"/>
                         </a:rPr>
-                        <a:t>49.7</a:t>
+                        <a:t>54.7</a:t>
                       </a:r>
                       <a:endParaRPr lang="en-US" sz="1000" dirty="0">
                         <a:latin typeface="Calibri" charset="0"/>
@@ -9837,13 +9837,13 @@
                       <a:r>
                         <a:rPr lang="en-US" sz="1000" b="1" dirty="0">
                           <a:solidFill>
-                            <a:srgbClr val="9E2A2B"/>
-                          </a:solidFill>
-                          <a:latin typeface="Calibri" pitchFamily="34" charset="0"/>
-                          <a:ea typeface="Calibri" pitchFamily="34" charset="-122"/>
-                          <a:cs typeface="Calibri" pitchFamily="34" charset="-120"/>
-                        </a:rPr>
-                        <a:t>−5.5</a:t>
+                            <a:srgbClr val="1C6B45"/>
+                          </a:solidFill>
+                          <a:latin typeface="Calibri" pitchFamily="34" charset="0"/>
+                          <a:ea typeface="Calibri" pitchFamily="34" charset="-122"/>
+                          <a:cs typeface="Calibri" pitchFamily="34" charset="-120"/>
+                        </a:rPr>
+                        <a:t>+0.3</a:t>
                       </a:r>
                       <a:endParaRPr lang="en-US" sz="1000" dirty="0">
                         <a:latin typeface="Calibri" charset="0"/>
@@ -9911,7 +9911,7 @@
                           <a:ea typeface="Calibri" pitchFamily="34" charset="-122"/>
                           <a:cs typeface="Calibri" pitchFamily="34" charset="-120"/>
                         </a:rPr>
-                        <a:t>−19.6</a:t>
+                        <a:t>−16.4</a:t>
                       </a:r>
                       <a:endParaRPr lang="en-US" sz="1000" dirty="0">
                         <a:latin typeface="Calibri" charset="0"/>
@@ -9981,7 +9981,7 @@
                           <a:ea typeface="Calibri" pitchFamily="34" charset="-122"/>
                           <a:cs typeface="Calibri" pitchFamily="34" charset="-120"/>
                         </a:rPr>
-                        <a:t>BFX Cells</a:t>
+                        <a:t>Hollister Closed Pouch</a:t>
                       </a:r>
                       <a:endParaRPr lang="en-US" sz="1000" dirty="0">
                         <a:latin typeface="Calibri" charset="0"/>
@@ -10046,7 +10046,7 @@
                           <a:ea typeface="Calibri" pitchFamily="34" charset="-122"/>
                           <a:cs typeface="Calibri" pitchFamily="34" charset="-120"/>
                         </a:rPr>
-                        <a:t>1</a:t>
+                        <a:t>6</a:t>
                       </a:r>
                       <a:endParaRPr lang="en-US" sz="1000" dirty="0">
                         <a:latin typeface="Calibri" charset="0"/>
@@ -10111,7 +10111,7 @@
                           <a:ea typeface="Calibri" pitchFamily="34" charset="-122"/>
                           <a:cs typeface="Calibri" pitchFamily="34" charset="-120"/>
                         </a:rPr>
-                        <a:t>58.9</a:t>
+                        <a:t>69.3</a:t>
                       </a:r>
                       <a:endParaRPr lang="en-US" sz="1000" dirty="0">
                         <a:latin typeface="Calibri" charset="0"/>
@@ -10176,7 +10176,7 @@
                           <a:ea typeface="Calibri" pitchFamily="34" charset="-122"/>
                           <a:cs typeface="Calibri" pitchFamily="34" charset="-120"/>
                         </a:rPr>
-                        <a:t>58.5</a:t>
+                        <a:t>55.8</a:t>
                       </a:r>
                       <a:endParaRPr lang="en-US" sz="1000" dirty="0">
                         <a:latin typeface="Calibri" charset="0"/>
@@ -10241,7 +10241,7 @@
                           <a:ea typeface="Calibri" pitchFamily="34" charset="-122"/>
                           <a:cs typeface="Calibri" pitchFamily="34" charset="-120"/>
                         </a:rPr>
-                        <a:t>59.7</a:t>
+                        <a:t>54.5</a:t>
                       </a:r>
                       <a:endParaRPr lang="en-US" sz="1000" dirty="0">
                         <a:latin typeface="Calibri" charset="0"/>
@@ -10306,7 +10306,7 @@
                           <a:ea typeface="Calibri" pitchFamily="34" charset="-122"/>
                           <a:cs typeface="Calibri" pitchFamily="34" charset="-120"/>
                         </a:rPr>
-                        <a:t>54.5</a:t>
+                        <a:t>54.0</a:t>
                       </a:r>
                       <a:endParaRPr lang="en-US" sz="1000" dirty="0">
                         <a:latin typeface="Calibri" charset="0"/>
@@ -10371,7 +10371,7 @@
                           <a:ea typeface="Calibri" pitchFamily="34" charset="-122"/>
                           <a:cs typeface="Calibri" pitchFamily="34" charset="-120"/>
                         </a:rPr>
-                        <a:t>71.6</a:t>
+                        <a:t>56.8</a:t>
                       </a:r>
                       <a:endParaRPr lang="en-US" sz="1000" dirty="0">
                         <a:latin typeface="Calibri" charset="0"/>
@@ -10436,7 +10436,7 @@
                           <a:ea typeface="Calibri" pitchFamily="34" charset="-122"/>
                           <a:cs typeface="Calibri" pitchFamily="34" charset="-120"/>
                         </a:rPr>
-                        <a:t>64.7</a:t>
+                        <a:t>44.4</a:t>
                       </a:r>
                       <a:endParaRPr lang="en-US" sz="1000" dirty="0">
                         <a:latin typeface="Calibri" charset="0"/>
@@ -10501,7 +10501,7 @@
                           <a:ea typeface="Calibri" pitchFamily="34" charset="-122"/>
                           <a:cs typeface="Calibri" pitchFamily="34" charset="-120"/>
                         </a:rPr>
-                        <a:t>45.3</a:t>
+                        <a:t>53.8</a:t>
                       </a:r>
                       <a:endParaRPr lang="en-US" sz="1000" dirty="0">
                         <a:latin typeface="Calibri" charset="0"/>
@@ -10566,7 +10566,7 @@
                           <a:ea typeface="Calibri" pitchFamily="34" charset="-122"/>
                           <a:cs typeface="Calibri" pitchFamily="34" charset="-120"/>
                         </a:rPr>
-                        <a:t>26.4</a:t>
+                        <a:t>51.0</a:t>
                       </a:r>
                       <a:endParaRPr lang="en-US" sz="1000" dirty="0">
                         <a:latin typeface="Calibri" charset="0"/>
@@ -10631,7 +10631,7 @@
                           <a:ea typeface="Calibri" pitchFamily="34" charset="-122"/>
                           <a:cs typeface="Calibri" pitchFamily="34" charset="-120"/>
                         </a:rPr>
-                        <a:t>61.1</a:t>
+                        <a:t>55.3</a:t>
                       </a:r>
                       <a:endParaRPr lang="en-US" sz="1000" dirty="0">
                         <a:latin typeface="Calibri" charset="0"/>
@@ -10696,7 +10696,7 @@
                           <a:ea typeface="Calibri" pitchFamily="34" charset="-122"/>
                           <a:cs typeface="Calibri" pitchFamily="34" charset="-120"/>
                         </a:rPr>
-                        <a:t>45.5</a:t>
+                        <a:t>49.7</a:t>
                       </a:r>
                       <a:endParaRPr lang="en-US" sz="1000" dirty="0">
                         <a:latin typeface="Calibri" charset="0"/>
@@ -10761,7 +10761,7 @@
                           <a:ea typeface="Calibri" pitchFamily="34" charset="-122"/>
                           <a:cs typeface="Calibri" pitchFamily="34" charset="-120"/>
                         </a:rPr>
-                        <a:t>−15.6</a:t>
+                        <a:t>−5.5</a:t>
                       </a:r>
                       <a:endParaRPr lang="en-US" sz="1000" dirty="0">
                         <a:latin typeface="Calibri" charset="0"/>
@@ -10826,7 +10826,7 @@
                           <a:ea typeface="Calibri" pitchFamily="34" charset="-122"/>
                           <a:cs typeface="Calibri" pitchFamily="34" charset="-120"/>
                         </a:rPr>
-                        <a:t>−13.4</a:t>
+                        <a:t>−19.6</a:t>
                       </a:r>
                       <a:endParaRPr lang="en-US" sz="1000" dirty="0">
                         <a:latin typeface="Calibri" charset="0"/>
@@ -12459,7 +12459,7 @@
                           <a:ea typeface="Calibri" pitchFamily="34" charset="-122"/>
                           <a:cs typeface="Calibri" pitchFamily="34" charset="-120"/>
                         </a:rPr>
-                        <a:t>54.5</a:t>
+                        <a:t>55.0</a:t>
                       </a:r>
                       <a:endParaRPr lang="en-US" sz="1000" dirty="0">
                         <a:latin typeface="Calibri" charset="0"/>
@@ -12595,7 +12595,7 @@
                           <a:ea typeface="Calibri" pitchFamily="34" charset="-122"/>
                           <a:cs typeface="Calibri" pitchFamily="34" charset="-120"/>
                         </a:rPr>
-                        <a:t>55.3</a:t>
+                        <a:t>55.5</a:t>
                       </a:r>
                       <a:endParaRPr lang="en-US" sz="1000" dirty="0">
                         <a:latin typeface="Calibri" charset="0"/>
@@ -12663,7 +12663,7 @@
                           <a:ea typeface="Calibri" pitchFamily="34" charset="-122"/>
                           <a:cs typeface="Calibri" pitchFamily="34" charset="-120"/>
                         </a:rPr>
-                        <a:t>−1.0</a:t>
+                        <a:t>−0.8</a:t>
                       </a:r>
                       <a:endParaRPr lang="en-US" sz="1000" dirty="0">
                         <a:latin typeface="Calibri" charset="0"/>
@@ -12731,7 +12731,7 @@
                           <a:ea typeface="Calibri" pitchFamily="34" charset="-122"/>
                           <a:cs typeface="Calibri" pitchFamily="34" charset="-120"/>
                         </a:rPr>
-                        <a:t>−13.3</a:t>
+                        <a:t>−13.1</a:t>
                       </a:r>
                       <a:endParaRPr lang="en-US" sz="1000" dirty="0">
                         <a:latin typeface="Calibri" charset="0"/>
@@ -13215,6 +13215,98 @@
         </p:nvSpPr>
         <p:spPr>
           <a:xfrm>
+            <a:off x="6309360" y="5779008"/>
+            <a:ext cx="5468112" cy="201168"/>
+          </a:xfrm>
+          <a:prstGeom prst="rect">
+            <a:avLst/>
+          </a:prstGeom>
+          <a:noFill/>
+          <a:ln/>
+        </p:spPr>
+        <p:txBody>
+          <a:bodyPr wrap="square" lIns="0" tIns="0" rIns="0" bIns="0" rtlCol="0" anchor="ctr"/>
+          <a:lstStyle/>
+          <a:p>
+            <a:pPr indent="0" marL="0">
+              <a:buNone/>
+            </a:pPr>
+            <a:r>
+              <a:rPr lang="en-US" sz="1100" b="1" dirty="0">
+                <a:solidFill>
+                  <a:srgbClr val="16203A"/>
+                </a:solidFill>
+                <a:latin typeface="Calibri" pitchFamily="34" charset="0"/>
+                <a:ea typeface="Calibri" pitchFamily="34" charset="-122"/>
+                <a:cs typeface="Calibri" pitchFamily="34" charset="-120"/>
+              </a:rPr>
+              <a:t>One reading dropped by request</a:t>
+            </a:r>
+            <a:endParaRPr lang="en-US" sz="1100" dirty="0"/>
+          </a:p>
+        </p:txBody>
+      </p:sp>
+      <p:sp>
+        <p:nvSpPr>
+          <p:cNvPr id="10" name="Text 7"/>
+          <p:cNvSpPr/>
+          <p:nvPr/>
+        </p:nvSpPr>
+        <p:spPr>
+          <a:xfrm>
+            <a:off x="6309360" y="5998464"/>
+            <a:ext cx="5468112" cy="420624"/>
+          </a:xfrm>
+          <a:prstGeom prst="rect">
+            <a:avLst/>
+          </a:prstGeom>
+          <a:noFill/>
+          <a:ln/>
+        </p:spPr>
+        <p:txBody>
+          <a:bodyPr wrap="square" lIns="0" tIns="0" rIns="0" bIns="0" rtlCol="0" anchor="ctr"/>
+          <a:lstStyle/>
+          <a:p>
+            <a:pPr indent="0" marL="0">
+              <a:buNone/>
+            </a:pPr>
+            <a:r>
+              <a:rPr lang="en-US" sz="950" b="1" dirty="0">
+                <a:solidFill>
+                  <a:srgbClr val="16203A"/>
+                </a:solidFill>
+                <a:latin typeface="Calibri" pitchFamily="34" charset="0"/>
+                <a:ea typeface="Calibri" pitchFamily="34" charset="-122"/>
+                <a:cs typeface="Calibri" pitchFamily="34" charset="-120"/>
+              </a:rPr>
+              <a:t>BFX1’s July reading (26.4%) is excluded</a:t>
+            </a:r>
+            <a:pPr indent="0" marL="0">
+              <a:buNone/>
+            </a:pPr>
+            <a:r>
+              <a:rPr lang="en-US" sz="950" dirty="0">
+                <a:solidFill>
+                  <a:srgbClr val="4A5670"/>
+                </a:solidFill>
+                <a:latin typeface="Calibri" pitchFamily="34" charset="0"/>
+                <a:ea typeface="Calibri" pitchFamily="34" charset="-122"/>
+                <a:cs typeface="Calibri" pitchFamily="34" charset="-120"/>
+              </a:rPr>
+              <a:t> from BFX Cells and the company average. It ends a steady four-month slide — 71.6 → 64.7 → 45.3 → 26.4 — not a one-off, so 55.0% understates an ongoing decline.</a:t>
+            </a:r>
+            <a:endParaRPr lang="en-US" sz="950" dirty="0"/>
+          </a:p>
+        </p:txBody>
+      </p:sp>
+      <p:sp>
+        <p:nvSpPr>
+          <p:cNvPr id="11" name="Text 8"/>
+          <p:cNvSpPr/>
+          <p:nvPr/>
+        </p:nvSpPr>
+        <p:spPr>
+          <a:xfrm>
             <a:off x="6309360" y="4315968"/>
             <a:ext cx="5468112" cy="201168"/>
           </a:xfrm>
@@ -14292,14 +14384,14 @@
       </p:graphicFrame>
       <p:sp>
         <p:nvSpPr>
-          <p:cNvPr id="11" name="Text 7"/>
+          <p:cNvPr id="13" name="Text 9"/>
           <p:cNvSpPr/>
           <p:nvPr/>
         </p:nvSpPr>
         <p:spPr>
           <a:xfrm>
-            <a:off x="6309360" y="5449824"/>
-            <a:ext cx="5468112" cy="310896"/>
+            <a:off x="6309360" y="5468112"/>
+            <a:ext cx="5468112" cy="201168"/>
           </a:xfrm>
           <a:prstGeom prst="rect">
             <a:avLst/>
@@ -14323,7 +14415,7 @@
                 <a:ea typeface="Calibri" pitchFamily="34" charset="-122"/>
                 <a:cs typeface="Calibri" pitchFamily="34" charset="-120"/>
               </a:rPr>
-              <a:t>Shown for reference only — these families are excluded from the chart, the company average and every figure on slide 1.</a:t>
+              <a:t>Shown for reference only — excluded from the chart, the company average and every figure on slide 1.</a:t>
             </a:r>
             <a:endParaRPr lang="en-US" sz="950" dirty="0"/>
           </a:p>
@@ -14331,7 +14423,7 @@
       </p:sp>
       <p:sp>
         <p:nvSpPr>
-          <p:cNvPr id="12" name="Shape 8"/>
+          <p:cNvPr id="14" name="Shape 10"/>
           <p:cNvSpPr/>
           <p:nvPr/>
         </p:nvSpPr>
@@ -14354,7 +14446,7 @@
       </p:sp>
       <p:sp>
         <p:nvSpPr>
-          <p:cNvPr id="13" name="Text 9"/>
+          <p:cNvPr id="15" name="Text 11"/>
           <p:cNvSpPr/>
           <p:nvPr/>
         </p:nvSpPr>
@@ -14385,7 +14477,7 @@
                 <a:ea typeface="Calibri" pitchFamily="34" charset="-122"/>
                 <a:cs typeface="Calibri" pitchFamily="34" charset="-120"/>
               </a:rPr>
-              <a:t>Source: Monthly OEE Live File — “OEE% by Month” and “WC Target OEE” tabs. Baseline = Jan–Apr 2026; last 3 months = May–Jul 2026 (July is the most recent complete month). April sits in the baseline: at 56.0% it ran below the Jan–Mar average and ranked 4th of the seven months. Urostomy (HU) Cells and Ring / Extruder are excluded throughout. Averages are the equal-weighted mean of each workcell’s monthly OEE; months with no production are excluded, months recorded as 0% are included.</a:t>
+              <a:t>Source: Monthly OEE Live File — “OEE% by Month” and “WC Target OEE” tabs. Baseline = Jan–Apr 2026; last 3 months = May–Jul 2026 (July is the most recent complete month). April sits in the baseline: at 56.0% it ran below the Jan–Mar average and ranked 4th of the seven months. Urostomy (HU) Cells and Ring / Extruder are excluded throughout. BFX1’s July reading is excluded from every average, so BFX Cells and the company figure are built from May–Jun for that cell. Averages are the equal-weighted mean of each workcell’s monthly OEE; months with no production are excluded, months recorded as 0% are included.</a:t>
             </a:r>
             <a:endParaRPr lang="en-US" sz="750" dirty="0"/>
           </a:p>
@@ -16955,7 +17047,7 @@
                           <a:ea typeface="Calibri" pitchFamily="34" charset="-122"/>
                           <a:cs typeface="Calibri" pitchFamily="34" charset="-120"/>
                         </a:rPr>
-                        <a:t>BFX1</a:t>
+                        <a:t>BIM 10 (997)</a:t>
                       </a:r>
                       <a:endParaRPr lang="en-US" sz="800" dirty="0">
                         <a:latin typeface="Calibri" charset="0"/>
@@ -17023,7 +17115,7 @@
                           <a:ea typeface="Calibri" pitchFamily="34" charset="-122"/>
                           <a:cs typeface="Calibri" pitchFamily="34" charset="-120"/>
                         </a:rPr>
-                        <a:t>BFX</a:t>
+                        <a:t>BIM</a:t>
                       </a:r>
                       <a:endParaRPr lang="en-US" sz="800" dirty="0">
                         <a:latin typeface="Calibri" charset="0"/>
@@ -17091,7 +17183,7 @@
                           <a:ea typeface="Calibri" pitchFamily="34" charset="-122"/>
                           <a:cs typeface="Calibri" pitchFamily="34" charset="-120"/>
                         </a:rPr>
-                        <a:t>58.9</a:t>
+                        <a:t>70.1</a:t>
                       </a:r>
                       <a:endParaRPr lang="en-US" sz="800" dirty="0">
                         <a:latin typeface="Calibri" charset="0"/>
@@ -17159,7 +17251,7 @@
                           <a:ea typeface="Calibri" pitchFamily="34" charset="-122"/>
                           <a:cs typeface="Calibri" pitchFamily="34" charset="-120"/>
                         </a:rPr>
-                        <a:t>61.1</a:t>
+                        <a:t>52.4</a:t>
                       </a:r>
                       <a:endParaRPr lang="en-US" sz="800" dirty="0">
                         <a:latin typeface="Calibri" charset="0"/>
@@ -17227,7 +17319,7 @@
                           <a:ea typeface="Calibri" pitchFamily="34" charset="-122"/>
                           <a:cs typeface="Calibri" pitchFamily="34" charset="-120"/>
                         </a:rPr>
-                        <a:t>45.5</a:t>
+                        <a:t>37.9</a:t>
                       </a:r>
                       <a:endParaRPr lang="en-US" sz="800" dirty="0">
                         <a:latin typeface="Calibri" charset="0"/>
@@ -17295,7 +17387,7 @@
                           <a:ea typeface="Calibri" pitchFamily="34" charset="-122"/>
                           <a:cs typeface="Calibri" pitchFamily="34" charset="-120"/>
                         </a:rPr>
-                        <a:t>−15.6</a:t>
+                        <a:t>−14.6</a:t>
                       </a:r>
                       <a:endParaRPr lang="en-US" sz="800" dirty="0">
                         <a:latin typeface="Calibri" charset="0"/>
@@ -17365,7 +17457,7 @@
                           <a:ea typeface="Calibri" pitchFamily="34" charset="-122"/>
                           <a:cs typeface="Calibri" pitchFamily="34" charset="-120"/>
                         </a:rPr>
-                        <a:t>BIM 10 (997)</a:t>
+                        <a:t>PCH01</a:t>
                       </a:r>
                       <a:endParaRPr lang="en-US" sz="800" dirty="0">
                         <a:latin typeface="Calibri" charset="0"/>
@@ -17430,7 +17522,7 @@
                           <a:ea typeface="Calibri" pitchFamily="34" charset="-122"/>
                           <a:cs typeface="Calibri" pitchFamily="34" charset="-120"/>
                         </a:rPr>
-                        <a:t>BIM</a:t>
+                        <a:t>Hol Closed</a:t>
                       </a:r>
                       <a:endParaRPr lang="en-US" sz="800" dirty="0">
                         <a:latin typeface="Calibri" charset="0"/>
@@ -17495,7 +17587,7 @@
                           <a:ea typeface="Calibri" pitchFamily="34" charset="-122"/>
                           <a:cs typeface="Calibri" pitchFamily="34" charset="-120"/>
                         </a:rPr>
-                        <a:t>70.1</a:t>
+                        <a:t>73.0</a:t>
                       </a:r>
                       <a:endParaRPr lang="en-US" sz="800" dirty="0">
                         <a:latin typeface="Calibri" charset="0"/>
@@ -17560,7 +17652,7 @@
                           <a:ea typeface="Calibri" pitchFamily="34" charset="-122"/>
                           <a:cs typeface="Calibri" pitchFamily="34" charset="-120"/>
                         </a:rPr>
-                        <a:t>52.4</a:t>
+                        <a:t>69.2</a:t>
                       </a:r>
                       <a:endParaRPr lang="en-US" sz="800" dirty="0">
                         <a:latin typeface="Calibri" charset="0"/>
@@ -17625,7 +17717,7 @@
                           <a:ea typeface="Calibri" pitchFamily="34" charset="-122"/>
                           <a:cs typeface="Calibri" pitchFamily="34" charset="-120"/>
                         </a:rPr>
-                        <a:t>37.9</a:t>
+                        <a:t>57.6</a:t>
                       </a:r>
                       <a:endParaRPr lang="en-US" sz="800" dirty="0">
                         <a:latin typeface="Calibri" charset="0"/>
@@ -17690,7 +17782,7 @@
                           <a:ea typeface="Calibri" pitchFamily="34" charset="-122"/>
                           <a:cs typeface="Calibri" pitchFamily="34" charset="-120"/>
                         </a:rPr>
-                        <a:t>−14.6</a:t>
+                        <a:t>−11.6</a:t>
                       </a:r>
                       <a:endParaRPr lang="en-US" sz="800" dirty="0">
                         <a:latin typeface="Calibri" charset="0"/>
@@ -17757,7 +17849,7 @@
                           <a:ea typeface="Calibri" pitchFamily="34" charset="-122"/>
                           <a:cs typeface="Calibri" pitchFamily="34" charset="-120"/>
                         </a:rPr>
-                        <a:t>PCH01</a:t>
+                        <a:t>BIM 2 (820)</a:t>
                       </a:r>
                       <a:endParaRPr lang="en-US" sz="800" dirty="0">
                         <a:latin typeface="Calibri" charset="0"/>
@@ -17825,7 +17917,7 @@
                           <a:ea typeface="Calibri" pitchFamily="34" charset="-122"/>
                           <a:cs typeface="Calibri" pitchFamily="34" charset="-120"/>
                         </a:rPr>
-                        <a:t>Hol Closed</a:t>
+                        <a:t>BIM</a:t>
                       </a:r>
                       <a:endParaRPr lang="en-US" sz="800" dirty="0">
                         <a:latin typeface="Calibri" charset="0"/>
@@ -17893,7 +17985,7 @@
                           <a:ea typeface="Calibri" pitchFamily="34" charset="-122"/>
                           <a:cs typeface="Calibri" pitchFamily="34" charset="-120"/>
                         </a:rPr>
-                        <a:t>73.0</a:t>
+                        <a:t>55.2</a:t>
                       </a:r>
                       <a:endParaRPr lang="en-US" sz="800" dirty="0">
                         <a:latin typeface="Calibri" charset="0"/>
@@ -17961,7 +18053,7 @@
                           <a:ea typeface="Calibri" pitchFamily="34" charset="-122"/>
                           <a:cs typeface="Calibri" pitchFamily="34" charset="-120"/>
                         </a:rPr>
-                        <a:t>69.2</a:t>
+                        <a:t>27.9</a:t>
                       </a:r>
                       <a:endParaRPr lang="en-US" sz="800" dirty="0">
                         <a:latin typeface="Calibri" charset="0"/>
@@ -18029,7 +18121,7 @@
                           <a:ea typeface="Calibri" pitchFamily="34" charset="-122"/>
                           <a:cs typeface="Calibri" pitchFamily="34" charset="-120"/>
                         </a:rPr>
-                        <a:t>57.6</a:t>
+                        <a:t>20.2</a:t>
                       </a:r>
                       <a:endParaRPr lang="en-US" sz="800" dirty="0">
                         <a:latin typeface="Calibri" charset="0"/>
@@ -18097,7 +18189,7 @@
                           <a:ea typeface="Calibri" pitchFamily="34" charset="-122"/>
                           <a:cs typeface="Calibri" pitchFamily="34" charset="-120"/>
                         </a:rPr>
-                        <a:t>−11.6</a:t>
+                        <a:t>−7.8</a:t>
                       </a:r>
                       <a:endParaRPr lang="en-US" sz="800" dirty="0">
                         <a:latin typeface="Calibri" charset="0"/>
@@ -18167,7 +18259,7 @@
                           <a:ea typeface="Calibri" pitchFamily="34" charset="-122"/>
                           <a:cs typeface="Calibri" pitchFamily="34" charset="-120"/>
                         </a:rPr>
-                        <a:t>BIM 2 (820)</a:t>
+                        <a:t>PCH07</a:t>
                       </a:r>
                       <a:endParaRPr lang="en-US" sz="800" dirty="0">
                         <a:latin typeface="Calibri" charset="0"/>
@@ -18232,7 +18324,7 @@
                           <a:ea typeface="Calibri" pitchFamily="34" charset="-122"/>
                           <a:cs typeface="Calibri" pitchFamily="34" charset="-120"/>
                         </a:rPr>
-                        <a:t>BIM</a:t>
+                        <a:t>Hol Closed</a:t>
                       </a:r>
                       <a:endParaRPr lang="en-US" sz="800" dirty="0">
                         <a:latin typeface="Calibri" charset="0"/>
@@ -18297,7 +18389,7 @@
                           <a:ea typeface="Calibri" pitchFamily="34" charset="-122"/>
                           <a:cs typeface="Calibri" pitchFamily="34" charset="-120"/>
                         </a:rPr>
-                        <a:t>55.2</a:t>
+                        <a:t>70.8</a:t>
                       </a:r>
                       <a:endParaRPr lang="en-US" sz="800" dirty="0">
                         <a:latin typeface="Calibri" charset="0"/>
@@ -18362,7 +18454,7 @@
                           <a:ea typeface="Calibri" pitchFamily="34" charset="-122"/>
                           <a:cs typeface="Calibri" pitchFamily="34" charset="-120"/>
                         </a:rPr>
-                        <a:t>27.9</a:t>
+                        <a:t>61.6</a:t>
                       </a:r>
                       <a:endParaRPr lang="en-US" sz="800" dirty="0">
                         <a:latin typeface="Calibri" charset="0"/>
@@ -18427,7 +18519,7 @@
                           <a:ea typeface="Calibri" pitchFamily="34" charset="-122"/>
                           <a:cs typeface="Calibri" pitchFamily="34" charset="-120"/>
                         </a:rPr>
-                        <a:t>20.2</a:t>
+                        <a:t>54.0</a:t>
                       </a:r>
                       <a:endParaRPr lang="en-US" sz="800" dirty="0">
                         <a:latin typeface="Calibri" charset="0"/>
@@ -18492,7 +18584,7 @@
                           <a:ea typeface="Calibri" pitchFamily="34" charset="-122"/>
                           <a:cs typeface="Calibri" pitchFamily="34" charset="-120"/>
                         </a:rPr>
-                        <a:t>−7.8</a:t>
+                        <a:t>−7.6</a:t>
                       </a:r>
                       <a:endParaRPr lang="en-US" sz="800" dirty="0">
                         <a:latin typeface="Calibri" charset="0"/>
@@ -18559,7 +18651,7 @@
                           <a:ea typeface="Calibri" pitchFamily="34" charset="-122"/>
                           <a:cs typeface="Calibri" pitchFamily="34" charset="-120"/>
                         </a:rPr>
-                        <a:t>PCH07</a:t>
+                        <a:t>PCH15</a:t>
                       </a:r>
                       <a:endParaRPr lang="en-US" sz="800" dirty="0">
                         <a:latin typeface="Calibri" charset="0"/>
@@ -18695,7 +18787,7 @@
                           <a:ea typeface="Calibri" pitchFamily="34" charset="-122"/>
                           <a:cs typeface="Calibri" pitchFamily="34" charset="-120"/>
                         </a:rPr>
-                        <a:t>70.8</a:t>
+                        <a:t>58.9</a:t>
                       </a:r>
                       <a:endParaRPr lang="en-US" sz="800" dirty="0">
                         <a:latin typeface="Calibri" charset="0"/>
@@ -18763,7 +18855,7 @@
                           <a:ea typeface="Calibri" pitchFamily="34" charset="-122"/>
                           <a:cs typeface="Calibri" pitchFamily="34" charset="-120"/>
                         </a:rPr>
-                        <a:t>61.6</a:t>
+                        <a:t>57.8</a:t>
                       </a:r>
                       <a:endParaRPr lang="en-US" sz="800" dirty="0">
                         <a:latin typeface="Calibri" charset="0"/>
@@ -18831,7 +18923,7 @@
                           <a:ea typeface="Calibri" pitchFamily="34" charset="-122"/>
                           <a:cs typeface="Calibri" pitchFamily="34" charset="-120"/>
                         </a:rPr>
-                        <a:t>54.0</a:t>
+                        <a:t>50.3</a:t>
                       </a:r>
                       <a:endParaRPr lang="en-US" sz="800" dirty="0">
                         <a:latin typeface="Calibri" charset="0"/>
@@ -18899,7 +18991,7 @@
                           <a:ea typeface="Calibri" pitchFamily="34" charset="-122"/>
                           <a:cs typeface="Calibri" pitchFamily="34" charset="-120"/>
                         </a:rPr>
-                        <a:t>−7.6</a:t>
+                        <a:t>−7.5</a:t>
                       </a:r>
                       <a:endParaRPr lang="en-US" sz="800" dirty="0">
                         <a:latin typeface="Calibri" charset="0"/>
@@ -18969,7 +19061,7 @@
                           <a:ea typeface="Calibri" pitchFamily="34" charset="-122"/>
                           <a:cs typeface="Calibri" pitchFamily="34" charset="-120"/>
                         </a:rPr>
-                        <a:t>PCH15</a:t>
+                        <a:t>Keifel12 (979)</a:t>
                       </a:r>
                       <a:endParaRPr lang="en-US" sz="800" dirty="0">
                         <a:latin typeface="Calibri" charset="0"/>
@@ -19034,7 +19126,7 @@
                           <a:ea typeface="Calibri" pitchFamily="34" charset="-122"/>
                           <a:cs typeface="Calibri" pitchFamily="34" charset="-120"/>
                         </a:rPr>
-                        <a:t>Hol Closed</a:t>
+                        <a:t>Hol Drain</a:t>
                       </a:r>
                       <a:endParaRPr lang="en-US" sz="800" dirty="0">
                         <a:latin typeface="Calibri" charset="0"/>
@@ -19099,7 +19191,7 @@
                           <a:ea typeface="Calibri" pitchFamily="34" charset="-122"/>
                           <a:cs typeface="Calibri" pitchFamily="34" charset="-120"/>
                         </a:rPr>
-                        <a:t>58.9</a:t>
+                        <a:t>62.6</a:t>
                       </a:r>
                       <a:endParaRPr lang="en-US" sz="800" dirty="0">
                         <a:latin typeface="Calibri" charset="0"/>
@@ -19164,7 +19256,7 @@
                           <a:ea typeface="Calibri" pitchFamily="34" charset="-122"/>
                           <a:cs typeface="Calibri" pitchFamily="34" charset="-120"/>
                         </a:rPr>
-                        <a:t>57.8</a:t>
+                        <a:t>63.5</a:t>
                       </a:r>
                       <a:endParaRPr lang="en-US" sz="800" dirty="0">
                         <a:latin typeface="Calibri" charset="0"/>
@@ -19229,7 +19321,7 @@
                           <a:ea typeface="Calibri" pitchFamily="34" charset="-122"/>
                           <a:cs typeface="Calibri" pitchFamily="34" charset="-120"/>
                         </a:rPr>
-                        <a:t>50.3</a:t>
+                        <a:t>56.3</a:t>
                       </a:r>
                       <a:endParaRPr lang="en-US" sz="800" dirty="0">
                         <a:latin typeface="Calibri" charset="0"/>
@@ -19294,7 +19386,7 @@
                           <a:ea typeface="Calibri" pitchFamily="34" charset="-122"/>
                           <a:cs typeface="Calibri" pitchFamily="34" charset="-120"/>
                         </a:rPr>
-                        <a:t>−7.5</a:t>
+                        <a:t>−7.2</a:t>
                       </a:r>
                       <a:endParaRPr lang="en-US" sz="800" dirty="0">
                         <a:latin typeface="Calibri" charset="0"/>
@@ -19361,7 +19453,7 @@
                           <a:ea typeface="Calibri" pitchFamily="34" charset="-122"/>
                           <a:cs typeface="Calibri" pitchFamily="34" charset="-120"/>
                         </a:rPr>
-                        <a:t>Keifel12 (979)</a:t>
+                        <a:t>2PCAC06</a:t>
                       </a:r>
                       <a:endParaRPr lang="en-US" sz="800" dirty="0">
                         <a:latin typeface="Calibri" charset="0"/>
@@ -19429,7 +19521,7 @@
                           <a:ea typeface="Calibri" pitchFamily="34" charset="-122"/>
                           <a:cs typeface="Calibri" pitchFamily="34" charset="-120"/>
                         </a:rPr>
-                        <a:t>Hol Drain</a:t>
+                        <a:t>2Pc AC</a:t>
                       </a:r>
                       <a:endParaRPr lang="en-US" sz="800" dirty="0">
                         <a:latin typeface="Calibri" charset="0"/>
@@ -19497,7 +19589,7 @@
                           <a:ea typeface="Calibri" pitchFamily="34" charset="-122"/>
                           <a:cs typeface="Calibri" pitchFamily="34" charset="-120"/>
                         </a:rPr>
-                        <a:t>62.6</a:t>
+                        <a:t>—</a:t>
                       </a:r>
                       <a:endParaRPr lang="en-US" sz="800" dirty="0">
                         <a:latin typeface="Calibri" charset="0"/>
@@ -19565,7 +19657,7 @@
                           <a:ea typeface="Calibri" pitchFamily="34" charset="-122"/>
                           <a:cs typeface="Calibri" pitchFamily="34" charset="-120"/>
                         </a:rPr>
-                        <a:t>63.5</a:t>
+                        <a:t>46.4</a:t>
                       </a:r>
                       <a:endParaRPr lang="en-US" sz="800" dirty="0">
                         <a:latin typeface="Calibri" charset="0"/>
@@ -19633,7 +19725,7 @@
                           <a:ea typeface="Calibri" pitchFamily="34" charset="-122"/>
                           <a:cs typeface="Calibri" pitchFamily="34" charset="-120"/>
                         </a:rPr>
-                        <a:t>56.3</a:t>
+                        <a:t>40.3</a:t>
                       </a:r>
                       <a:endParaRPr lang="en-US" sz="800" dirty="0">
                         <a:latin typeface="Calibri" charset="0"/>
@@ -19701,7 +19793,7 @@
                           <a:ea typeface="Calibri" pitchFamily="34" charset="-122"/>
                           <a:cs typeface="Calibri" pitchFamily="34" charset="-120"/>
                         </a:rPr>
-                        <a:t>−7.2</a:t>
+                        <a:t>−6.2</a:t>
                       </a:r>
                       <a:endParaRPr lang="en-US" sz="800" dirty="0">
                         <a:latin typeface="Calibri" charset="0"/>
@@ -19771,7 +19863,7 @@
                           <a:ea typeface="Calibri" pitchFamily="34" charset="-122"/>
                           <a:cs typeface="Calibri" pitchFamily="34" charset="-120"/>
                         </a:rPr>
-                        <a:t>2PCAC06</a:t>
+                        <a:t>BFX1</a:t>
                       </a:r>
                       <a:endParaRPr lang="en-US" sz="800" dirty="0">
                         <a:latin typeface="Calibri" charset="0"/>
@@ -19836,7 +19928,7 @@
                           <a:ea typeface="Calibri" pitchFamily="34" charset="-122"/>
                           <a:cs typeface="Calibri" pitchFamily="34" charset="-120"/>
                         </a:rPr>
-                        <a:t>2Pc AC</a:t>
+                        <a:t>BFX</a:t>
                       </a:r>
                       <a:endParaRPr lang="en-US" sz="800" dirty="0">
                         <a:latin typeface="Calibri" charset="0"/>
@@ -19901,7 +19993,7 @@
                           <a:ea typeface="Calibri" pitchFamily="34" charset="-122"/>
                           <a:cs typeface="Calibri" pitchFamily="34" charset="-120"/>
                         </a:rPr>
-                        <a:t>—</a:t>
+                        <a:t>58.9</a:t>
                       </a:r>
                       <a:endParaRPr lang="en-US" sz="800" dirty="0">
                         <a:latin typeface="Calibri" charset="0"/>
@@ -19966,7 +20058,7 @@
                           <a:ea typeface="Calibri" pitchFamily="34" charset="-122"/>
                           <a:cs typeface="Calibri" pitchFamily="34" charset="-120"/>
                         </a:rPr>
-                        <a:t>46.4</a:t>
+                        <a:t>61.1</a:t>
                       </a:r>
                       <a:endParaRPr lang="en-US" sz="800" dirty="0">
                         <a:latin typeface="Calibri" charset="0"/>
@@ -20031,7 +20123,7 @@
                           <a:ea typeface="Calibri" pitchFamily="34" charset="-122"/>
                           <a:cs typeface="Calibri" pitchFamily="34" charset="-120"/>
                         </a:rPr>
-                        <a:t>40.3</a:t>
+                        <a:t>55.0</a:t>
                       </a:r>
                       <a:endParaRPr lang="en-US" sz="800" dirty="0">
                         <a:latin typeface="Calibri" charset="0"/>
@@ -20096,7 +20188,7 @@
                           <a:ea typeface="Calibri" pitchFamily="34" charset="-122"/>
                           <a:cs typeface="Calibri" pitchFamily="34" charset="-120"/>
                         </a:rPr>
-                        <a:t>−6.2</a:t>
+                        <a:t>−6.1</a:t>
                       </a:r>
                       <a:endParaRPr lang="en-US" sz="800" dirty="0">
                         <a:latin typeface="Calibri" charset="0"/>
